--- a/slides/Neural-Lab-Lesson.pptx
+++ b/slides/Neural-Lab-Lesson.pptx
@@ -698,7 +698,7 @@
           <a:p>
             <a:r>
               <a:rPr lang="en-US" dirty="0"/>
-              <a:t>5 min. This is the app you will use in a few minutes. Left: a team drawing mangoes and cricket balls; each drawing added becomes one example in the training set at the bottom. Right: after Train, the score on their own drawings and a test with a fresh drawing. Walk through the buttons: Add this drawing, Train it, What is it?, Send my machine to the class.</a:t>
+              <a:t>3 min. This is the app you will use in a few minutes. Left: a team drawing mangoes and cricket balls; each drawing added becomes one example under Your examples (the third shot). Right: after Train, the score on their own drawings and a test with a fresh drawing. Walk through the buttons: Add this drawing, Train it, What is it?, Send my machine to the class.</a:t>
             </a:r>
             <a:endParaRPr lang="en-US" dirty="0"/>
           </a:p>
@@ -2282,7 +2282,7 @@
           <a:p>
             <a:r>
               <a:rPr lang="en-US" dirty="0"/>
-              <a:t>4 min. Training is a loop. Show it one drawing. It guesses. Compare the guess with the label you gave. Nudge every knob a tiny bit in the direction that would have made the guess less wrong. Next drawing. Ten drawings, 240 laps, about one second on a phone. Don't use the word gradient. If someone asks how it knows which way to nudge: it tries the tiniest change and keeps the direction that helped.</a:t>
+              <a:t>3 min. Training is a loop. Show it one drawing. It guesses. Compare the guess with the label you gave. Nudge every knob a tiny bit in the direction that would have made the guess less wrong. Next drawing. Ten drawings, 240 laps, about one second on a phone. Don't use the word gradient. If someone asks how it knows which way to nudge: it tries the tiniest change and keeps the direction that helped.</a:t>
             </a:r>
             <a:endParaRPr lang="en-US" dirty="0"/>
           </a:p>
@@ -45717,7 +45717,46 @@
       </p:sp>
       <p:sp>
         <p:nvSpPr>
-          <p:cNvPr id="6" name="Shape 3"/>
+          <p:cNvPr id="6" name="Text 3"/>
+          <p:cNvSpPr/>
+          <p:nvPr/>
+        </p:nvSpPr>
+        <p:spPr>
+          <a:xfrm>
+            <a:off x="2377440" y="1307592"/>
+            <a:ext cx="1828800" cy="274320"/>
+          </a:xfrm>
+          <a:prstGeom prst="rect">
+            <a:avLst/>
+          </a:prstGeom>
+          <a:noFill/>
+          <a:ln/>
+        </p:spPr>
+        <p:txBody>
+          <a:bodyPr wrap="square" rtlCol="0" anchor="ctr"/>
+          <a:lstStyle/>
+          <a:p>
+            <a:pPr algn="r" indent="0" marL="0">
+              <a:buNone/>
+            </a:pPr>
+            <a:r>
+              <a:rPr lang="en-US" sz="1000" b="1" spc="100" kern="0" dirty="0">
+                <a:solidFill>
+                  <a:srgbClr val="D9651F"/>
+                </a:solidFill>
+                <a:latin typeface="Calibri" pitchFamily="34" charset="0"/>
+                <a:ea typeface="Calibri" pitchFamily="34" charset="-122"/>
+                <a:cs typeface="Calibri" pitchFamily="34" charset="-120"/>
+              </a:rPr>
+              <a:t>A BRAIN CELL</a:t>
+            </a:r>
+            <a:endParaRPr lang="en-US" sz="1000" dirty="0"/>
+          </a:p>
+        </p:txBody>
+      </p:sp>
+      <p:sp>
+        <p:nvSpPr>
+          <p:cNvPr id="7" name="Shape 4"/>
           <p:cNvSpPr/>
           <p:nvPr/>
         </p:nvSpPr>
@@ -45740,7 +45779,7 @@
       </p:sp>
       <p:sp>
         <p:nvSpPr>
-          <p:cNvPr id="7" name="Shape 4"/>
+          <p:cNvPr id="8" name="Shape 5"/>
           <p:cNvSpPr/>
           <p:nvPr/>
         </p:nvSpPr>
@@ -45763,7 +45802,7 @@
       </p:sp>
       <p:sp>
         <p:nvSpPr>
-          <p:cNvPr id="8" name="Shape 5"/>
+          <p:cNvPr id="9" name="Shape 6"/>
           <p:cNvSpPr/>
           <p:nvPr/>
         </p:nvSpPr>
@@ -45786,7 +45825,7 @@
       </p:sp>
       <p:sp>
         <p:nvSpPr>
-          <p:cNvPr id="9" name="Shape 6"/>
+          <p:cNvPr id="10" name="Shape 7"/>
           <p:cNvSpPr/>
           <p:nvPr/>
         </p:nvSpPr>
@@ -45809,7 +45848,7 @@
       </p:sp>
       <p:sp>
         <p:nvSpPr>
-          <p:cNvPr id="10" name="Shape 7"/>
+          <p:cNvPr id="11" name="Shape 8"/>
           <p:cNvSpPr/>
           <p:nvPr/>
         </p:nvSpPr>
@@ -45832,7 +45871,7 @@
       </p:sp>
       <p:sp>
         <p:nvSpPr>
-          <p:cNvPr id="11" name="Shape 8"/>
+          <p:cNvPr id="12" name="Shape 9"/>
           <p:cNvSpPr/>
           <p:nvPr/>
         </p:nvSpPr>
@@ -45855,7 +45894,7 @@
       </p:sp>
       <p:sp>
         <p:nvSpPr>
-          <p:cNvPr id="12" name="Shape 9"/>
+          <p:cNvPr id="13" name="Shape 10"/>
           <p:cNvSpPr/>
           <p:nvPr/>
         </p:nvSpPr>
@@ -45878,7 +45917,7 @@
       </p:sp>
       <p:sp>
         <p:nvSpPr>
-          <p:cNvPr id="13" name="Shape 10"/>
+          <p:cNvPr id="14" name="Shape 11"/>
           <p:cNvSpPr/>
           <p:nvPr/>
         </p:nvSpPr>
@@ -45903,7 +45942,7 @@
       </p:sp>
       <p:sp>
         <p:nvSpPr>
-          <p:cNvPr id="14" name="Shape 11"/>
+          <p:cNvPr id="15" name="Shape 12"/>
           <p:cNvSpPr/>
           <p:nvPr/>
         </p:nvSpPr>
@@ -45926,7 +45965,7 @@
       </p:sp>
       <p:sp>
         <p:nvSpPr>
-          <p:cNvPr id="15" name="Shape 12"/>
+          <p:cNvPr id="16" name="Shape 13"/>
           <p:cNvSpPr/>
           <p:nvPr/>
         </p:nvSpPr>
@@ -45951,7 +45990,7 @@
       </p:sp>
       <p:sp>
         <p:nvSpPr>
-          <p:cNvPr id="16" name="Shape 13"/>
+          <p:cNvPr id="17" name="Shape 14"/>
           <p:cNvSpPr/>
           <p:nvPr/>
         </p:nvSpPr>
@@ -45974,7 +46013,7 @@
       </p:sp>
       <p:sp>
         <p:nvSpPr>
-          <p:cNvPr id="17" name="Shape 14"/>
+          <p:cNvPr id="18" name="Shape 15"/>
           <p:cNvSpPr/>
           <p:nvPr/>
         </p:nvSpPr>
@@ -45999,7 +46038,7 @@
       </p:sp>
       <p:sp>
         <p:nvSpPr>
-          <p:cNvPr id="18" name="Shape 15"/>
+          <p:cNvPr id="19" name="Shape 16"/>
           <p:cNvSpPr/>
           <p:nvPr/>
         </p:nvSpPr>
@@ -46024,7 +46063,7 @@
       </p:sp>
       <p:sp>
         <p:nvSpPr>
-          <p:cNvPr id="19" name="Text 16"/>
+          <p:cNvPr id="20" name="Text 17"/>
           <p:cNvSpPr/>
           <p:nvPr/>
         </p:nvSpPr>
@@ -46066,7 +46105,7 @@
       </p:sp>
       <p:sp>
         <p:nvSpPr>
-          <p:cNvPr id="20" name="Text 17"/>
+          <p:cNvPr id="21" name="Text 18"/>
           <p:cNvSpPr/>
           <p:nvPr/>
         </p:nvSpPr>
@@ -46108,7 +46147,7 @@
       </p:sp>
       <p:sp>
         <p:nvSpPr>
-          <p:cNvPr id="21" name="Text 18"/>
+          <p:cNvPr id="22" name="Text 19"/>
           <p:cNvSpPr/>
           <p:nvPr/>
         </p:nvSpPr>
@@ -46150,7 +46189,7 @@
       </p:sp>
       <p:sp>
         <p:nvSpPr>
-          <p:cNvPr id="22" name="Shape 19"/>
+          <p:cNvPr id="23" name="Shape 20"/>
           <p:cNvSpPr/>
           <p:nvPr/>
         </p:nvSpPr>
@@ -46177,7 +46216,7 @@
       </p:sp>
       <p:sp>
         <p:nvSpPr>
-          <p:cNvPr id="23" name="Shape 20"/>
+          <p:cNvPr id="24" name="Shape 21"/>
           <p:cNvSpPr/>
           <p:nvPr/>
         </p:nvSpPr>
@@ -46204,7 +46243,46 @@
       </p:sp>
       <p:sp>
         <p:nvSpPr>
-          <p:cNvPr id="24" name="Shape 21"/>
+          <p:cNvPr id="25" name="Text 22"/>
+          <p:cNvSpPr/>
+          <p:nvPr/>
+        </p:nvSpPr>
+        <p:spPr>
+          <a:xfrm>
+            <a:off x="6675120" y="1307592"/>
+            <a:ext cx="1828800" cy="274320"/>
+          </a:xfrm>
+          <a:prstGeom prst="rect">
+            <a:avLst/>
+          </a:prstGeom>
+          <a:noFill/>
+          <a:ln/>
+        </p:spPr>
+        <p:txBody>
+          <a:bodyPr wrap="square" rtlCol="0" anchor="ctr"/>
+          <a:lstStyle/>
+          <a:p>
+            <a:pPr algn="r" indent="0" marL="0">
+              <a:buNone/>
+            </a:pPr>
+            <a:r>
+              <a:rPr lang="en-US" sz="1000" b="1" spc="100" kern="0" dirty="0">
+                <a:solidFill>
+                  <a:srgbClr val="2378BD"/>
+                </a:solidFill>
+                <a:latin typeface="Calibri" pitchFamily="34" charset="0"/>
+                <a:ea typeface="Calibri" pitchFamily="34" charset="-122"/>
+                <a:cs typeface="Calibri" pitchFamily="34" charset="-120"/>
+              </a:rPr>
+              <a:t>THE COPY, 1943</a:t>
+            </a:r>
+            <a:endParaRPr lang="en-US" sz="1000" dirty="0"/>
+          </a:p>
+        </p:txBody>
+      </p:sp>
+      <p:sp>
+        <p:nvSpPr>
+          <p:cNvPr id="26" name="Shape 23"/>
           <p:cNvSpPr/>
           <p:nvPr/>
         </p:nvSpPr>
@@ -46227,7 +46305,7 @@
       </p:sp>
       <p:sp>
         <p:nvSpPr>
-          <p:cNvPr id="25" name="Shape 22"/>
+          <p:cNvPr id="27" name="Shape 24"/>
           <p:cNvSpPr/>
           <p:nvPr/>
         </p:nvSpPr>
@@ -46250,7 +46328,7 @@
       </p:sp>
       <p:sp>
         <p:nvSpPr>
-          <p:cNvPr id="26" name="Shape 23"/>
+          <p:cNvPr id="28" name="Shape 25"/>
           <p:cNvSpPr/>
           <p:nvPr/>
         </p:nvSpPr>
@@ -46273,7 +46351,7 @@
       </p:sp>
       <p:sp>
         <p:nvSpPr>
-          <p:cNvPr id="27" name="Shape 24"/>
+          <p:cNvPr id="29" name="Shape 26"/>
           <p:cNvSpPr/>
           <p:nvPr/>
         </p:nvSpPr>
@@ -46296,7 +46374,7 @@
       </p:sp>
       <p:sp>
         <p:nvSpPr>
-          <p:cNvPr id="28" name="Shape 25"/>
+          <p:cNvPr id="30" name="Shape 27"/>
           <p:cNvSpPr/>
           <p:nvPr/>
         </p:nvSpPr>
@@ -46321,7 +46399,7 @@
       </p:sp>
       <p:sp>
         <p:nvSpPr>
-          <p:cNvPr id="29" name="Shape 26"/>
+          <p:cNvPr id="31" name="Shape 28"/>
           <p:cNvSpPr/>
           <p:nvPr/>
         </p:nvSpPr>
@@ -46346,7 +46424,7 @@
       </p:sp>
       <p:sp>
         <p:nvSpPr>
-          <p:cNvPr id="30" name="Shape 27"/>
+          <p:cNvPr id="32" name="Shape 29"/>
           <p:cNvSpPr/>
           <p:nvPr/>
         </p:nvSpPr>
@@ -46371,7 +46449,7 @@
       </p:sp>
       <p:sp>
         <p:nvSpPr>
-          <p:cNvPr id="31" name="Shape 28"/>
+          <p:cNvPr id="33" name="Shape 30"/>
           <p:cNvSpPr/>
           <p:nvPr/>
         </p:nvSpPr>
@@ -46396,7 +46474,7 @@
       </p:sp>
       <p:sp>
         <p:nvSpPr>
-          <p:cNvPr id="32" name="Shape 29"/>
+          <p:cNvPr id="34" name="Shape 31"/>
           <p:cNvSpPr/>
           <p:nvPr/>
         </p:nvSpPr>
@@ -46421,7 +46499,7 @@
       </p:sp>
       <p:sp>
         <p:nvSpPr>
-          <p:cNvPr id="33" name="Text 30"/>
+          <p:cNvPr id="35" name="Text 32"/>
           <p:cNvSpPr/>
           <p:nvPr/>
         </p:nvSpPr>
@@ -46463,7 +46541,7 @@
       </p:sp>
       <p:sp>
         <p:nvSpPr>
-          <p:cNvPr id="34" name="Text 31"/>
+          <p:cNvPr id="36" name="Text 33"/>
           <p:cNvSpPr/>
           <p:nvPr/>
         </p:nvSpPr>
@@ -46505,7 +46583,7 @@
       </p:sp>
       <p:sp>
         <p:nvSpPr>
-          <p:cNvPr id="35" name="Text 32"/>
+          <p:cNvPr id="37" name="Text 34"/>
           <p:cNvSpPr/>
           <p:nvPr/>
         </p:nvSpPr>
@@ -46547,7 +46625,7 @@
       </p:sp>
       <p:sp>
         <p:nvSpPr>
-          <p:cNvPr id="36" name="Text 33"/>
+          <p:cNvPr id="38" name="Text 35"/>
           <p:cNvSpPr/>
           <p:nvPr/>
         </p:nvSpPr>
